--- a/docs/competition/기술설명서_Home_Compass.pptx
+++ b/docs/competition/기술설명서_Home_Compass.pptx
@@ -3808,7 +3808,7 @@
                 <a:ea typeface="맑은 고딕"/>
                 <a:cs typeface="맑은 고딕"/>
               </a:rPr>
-              <a:t>참가 구분</a:t>
+              <a:t>제출 구분</a:t>
             </a:r>
           </a:p>
           <a:p>
@@ -3832,7 +3832,7 @@
                 <a:ea typeface="맑은 고딕"/>
                 <a:cs typeface="맑은 고딕"/>
               </a:rPr>
-              <a:t>개인 참가</a:t>
+              <a:t>작동형 웹서비스 · 기술설명</a:t>
             </a:r>
           </a:p>
         </p:txBody>
@@ -3879,7 +3879,7 @@
                 <a:ea typeface="맑은 고딕"/>
                 <a:cs typeface="맑은 고딕"/>
               </a:rPr>
-              <a:t>2026년 8월 3일</a:t>
+              <a:t>2026 금융 AI Challenge 제출본</a:t>
             </a:r>
           </a:p>
         </p:txBody>
@@ -20867,7 +20867,7 @@
                 <a:ea typeface="맑은 고딕"/>
                 <a:cs typeface="맑은 고딕"/>
               </a:rPr>
-              <a:t>· 본 기술설명서 14장</a:t>
+              <a:t>· 본 기술설명서 18장</a:t>
             </a:r>
           </a:p>
         </p:txBody>
@@ -21081,7 +21081,7 @@
                 <a:ea typeface="맑은 고딕"/>
                 <a:cs typeface="맑은 고딕"/>
               </a:rPr>
-              <a:t>KB 사업 연계 · 기대효과 · 향후 확장</a:t>
+              <a:t>금융 서비스 연계 · 기대효과 · 향후 확장</a:t>
             </a:r>
           </a:p>
         </p:txBody>
@@ -21372,7 +21372,7 @@
                 <a:ea typeface="맑은 고딕"/>
                 <a:cs typeface="맑은 고딕"/>
               </a:rPr>
-              <a:t>KB국민은행의 핵심 사업영역인</a:t>
+              <a:t>은행·보증기관의 핵심 사업영역인</a:t>
             </a:r>
           </a:p>
           <a:p>
@@ -22778,7 +22778,7 @@
                 <a:ea typeface="맑은 고딕"/>
                 <a:cs typeface="맑은 고딕"/>
               </a:rPr>
-              <a:t>KB 주택금융 상품 카탈로그</a:t>
+              <a:t>기관별 주택금융 상품 카탈로그</a:t>
             </a:r>
           </a:p>
           <a:p>
@@ -38854,7 +38854,7 @@
                 <a:ea typeface="맑은 고딕"/>
                 <a:cs typeface="맑은 고딕"/>
               </a:rPr>
-              <a:t>정책 요건은 공개된 일반 기준 수준으로만 기술하며, 구체적 금리·한도 수치는 예시값으로 명시합니다. (14장 참조)</a:t>
+              <a:t>정책 요건은 공개된 일반 기준 수준으로만 기술하며, 구체적 금리·한도 수치는 예시값으로 명시합니다. (18장 참조)</a:t>
             </a:r>
           </a:p>
         </p:txBody>

--- a/docs/competition/기술설명서_Home_Compass.pptx
+++ b/docs/competition/기술설명서_Home_Compass.pptx
@@ -5756,7 +5756,7 @@
                 <a:ea typeface="맑은 고딕"/>
                 <a:cs typeface="맑은 고딕"/>
               </a:rPr>
-              <a:t>“보증금에 묶이는 자기자본 8,000만원의 기회비용을 연 3.3%로 계산해 1,304만원을 총비용에 포함했습니다.”</a:t>
+              <a:t>“보증금에 묶이는 자기자본 5,500만원의 기회비용을 연 3.3%로 계산해 897만원을 총비용에 포함했습니다. 보증금 자체는 계약 종료 시 돌려받으므로 비용이 아닙니다.”</a:t>
             </a:r>
           </a:p>
           <a:p>
@@ -5780,7 +5780,7 @@
                 <a:ea typeface="맑은 고딕"/>
                 <a:cs typeface="맑은 고딕"/>
               </a:rPr>
-              <a:t>“월 환산비용이 권장액 73만원은 넘지만 상한 86만원 이내여서 무리하면 가능한 구간입니다. (stretch)”</a:t>
+              <a:t>“월 환산비용이 권장액 73만원은 넘지만 상한 86만원 이내여서 무리하면 가능한 구간입니다.”</a:t>
             </a:r>
           </a:p>
         </p:txBody>
@@ -36510,7 +36510,7 @@
                 <a:ea typeface="맑은 고딕"/>
                 <a:cs typeface="맑은 고딕"/>
               </a:rPr>
-              <a:t>“소득 대비 주거비 여력이 안정적인 구간(safe)입니다.”</a:t>
+              <a:t>“소득 대비 주거비 여력이 안정적인 구간입니다.”</a:t>
             </a:r>
           </a:p>
         </p:txBody>
@@ -38807,7 +38807,7 @@
                 <a:ea typeface="맑은 고딕"/>
                 <a:cs typeface="맑은 고딕"/>
               </a:rPr>
-              <a:t>“주택 유형·전세가율·선순위 채권 규모에 따라 보증 가입이 제한될 수 있습니다. (conditional)”</a:t>
+              <a:t>“주택 유형·전세가율·선순위 채권 규모에 따라 보증 가입이 제한될 수 있습니다.”</a:t>
             </a:r>
           </a:p>
         </p:txBody>

--- a/docs/competition/기술설명서_Home_Compass.pptx
+++ b/docs/competition/기술설명서_Home_Compass.pptx
@@ -3651,239 +3651,6 @@
           </a:p>
         </p:txBody>
       </p:sp>
-      <p:sp>
-        <p:nvSpPr>
-          <p:cNvPr id="11" name="Rounded Rectangle 10"/>
-          <p:cNvSpPr/>
-          <p:nvPr/>
-        </p:nvSpPr>
-        <p:spPr>
-          <a:xfrm>
-            <a:off x="1005840" y="5230368"/>
-            <a:ext cx="4663440" cy="822960"/>
-          </a:xfrm>
-          <a:prstGeom prst="roundRect">
-            <a:avLst>
-              <a:gd name="adj" fmla="val 10000"/>
-            </a:avLst>
-          </a:prstGeom>
-          <a:solidFill>
-            <a:srgbClr val="383838"/>
-          </a:solidFill>
-          <a:ln>
-            <a:noFill/>
-          </a:ln>
-          <a:effectLst/>
-        </p:spPr>
-        <p:style>
-          <a:lnRef idx="1">
-            <a:schemeClr val="accent1"/>
-          </a:lnRef>
-          <a:fillRef idx="3">
-            <a:schemeClr val="accent1"/>
-          </a:fillRef>
-          <a:effectRef idx="2">
-            <a:schemeClr val="accent1"/>
-          </a:effectRef>
-          <a:fontRef idx="minor">
-            <a:schemeClr val="lt1"/>
-          </a:fontRef>
-        </p:style>
-        <p:txBody>
-          <a:bodyPr rtlCol="0" anchor="ctr" lIns="219456" rIns="182880" tIns="128016" bIns="109728" wrap="square">
-            <a:noAutofit/>
-          </a:bodyPr>
-          <a:lstStyle/>
-          <a:p>
-            <a:pPr algn="l">
-              <a:lnSpc>
-                <a:spcPct val="115000"/>
-              </a:lnSpc>
-              <a:spcBef>
-                <a:spcPts val="0"/>
-              </a:spcBef>
-              <a:spcAft>
-                <a:spcPts val="0"/>
-              </a:spcAft>
-            </a:pPr>
-            <a:r>
-              <a:rPr sz="950" b="1" i="0">
-                <a:solidFill>
-                  <a:srgbClr val="FFB800"/>
-                </a:solidFill>
-                <a:latin typeface="맑은 고딕"/>
-                <a:ea typeface="맑은 고딕"/>
-                <a:cs typeface="맑은 고딕"/>
-              </a:rPr>
-              <a:t>과제 주제</a:t>
-            </a:r>
-          </a:p>
-          <a:p>
-            <a:pPr algn="l">
-              <a:lnSpc>
-                <a:spcPct val="115000"/>
-              </a:lnSpc>
-              <a:spcBef>
-                <a:spcPts val="300"/>
-              </a:spcBef>
-              <a:spcAft>
-                <a:spcPts val="0"/>
-              </a:spcAft>
-            </a:pPr>
-            <a:r>
-              <a:rPr sz="1200" b="1" i="0">
-                <a:solidFill>
-                  <a:srgbClr val="FFFFFF"/>
-                </a:solidFill>
-                <a:latin typeface="맑은 고딕"/>
-                <a:ea typeface="맑은 고딕"/>
-                <a:cs typeface="맑은 고딕"/>
-              </a:rPr>
-              <a:t>「현직자 Pick」 No.1 — 청년 주거 금융 도우미</a:t>
-            </a:r>
-          </a:p>
-        </p:txBody>
-      </p:sp>
-      <p:sp>
-        <p:nvSpPr>
-          <p:cNvPr id="12" name="Rounded Rectangle 11"/>
-          <p:cNvSpPr/>
-          <p:nvPr/>
-        </p:nvSpPr>
-        <p:spPr>
-          <a:xfrm>
-            <a:off x="5870448" y="5230368"/>
-            <a:ext cx="2743200" cy="822960"/>
-          </a:xfrm>
-          <a:prstGeom prst="roundRect">
-            <a:avLst>
-              <a:gd name="adj" fmla="val 10000"/>
-            </a:avLst>
-          </a:prstGeom>
-          <a:solidFill>
-            <a:srgbClr val="383838"/>
-          </a:solidFill>
-          <a:ln>
-            <a:noFill/>
-          </a:ln>
-          <a:effectLst/>
-        </p:spPr>
-        <p:style>
-          <a:lnRef idx="1">
-            <a:schemeClr val="accent1"/>
-          </a:lnRef>
-          <a:fillRef idx="3">
-            <a:schemeClr val="accent1"/>
-          </a:fillRef>
-          <a:effectRef idx="2">
-            <a:schemeClr val="accent1"/>
-          </a:effectRef>
-          <a:fontRef idx="minor">
-            <a:schemeClr val="lt1"/>
-          </a:fontRef>
-        </p:style>
-        <p:txBody>
-          <a:bodyPr rtlCol="0" anchor="ctr" lIns="219456" rIns="182880" tIns="128016" bIns="109728" wrap="square">
-            <a:noAutofit/>
-          </a:bodyPr>
-          <a:lstStyle/>
-          <a:p>
-            <a:pPr algn="l">
-              <a:lnSpc>
-                <a:spcPct val="115000"/>
-              </a:lnSpc>
-              <a:spcBef>
-                <a:spcPts val="0"/>
-              </a:spcBef>
-              <a:spcAft>
-                <a:spcPts val="0"/>
-              </a:spcAft>
-            </a:pPr>
-            <a:r>
-              <a:rPr sz="950" b="1" i="0">
-                <a:solidFill>
-                  <a:srgbClr val="FFB800"/>
-                </a:solidFill>
-                <a:latin typeface="맑은 고딕"/>
-                <a:ea typeface="맑은 고딕"/>
-                <a:cs typeface="맑은 고딕"/>
-              </a:rPr>
-              <a:t>제출 구분</a:t>
-            </a:r>
-          </a:p>
-          <a:p>
-            <a:pPr algn="l">
-              <a:lnSpc>
-                <a:spcPct val="115000"/>
-              </a:lnSpc>
-              <a:spcBef>
-                <a:spcPts val="300"/>
-              </a:spcBef>
-              <a:spcAft>
-                <a:spcPts val="0"/>
-              </a:spcAft>
-            </a:pPr>
-            <a:r>
-              <a:rPr sz="1200" b="1" i="0">
-                <a:solidFill>
-                  <a:srgbClr val="FFFFFF"/>
-                </a:solidFill>
-                <a:latin typeface="맑은 고딕"/>
-                <a:ea typeface="맑은 고딕"/>
-                <a:cs typeface="맑은 고딕"/>
-              </a:rPr>
-              <a:t>작동형 웹서비스 · 기술설명</a:t>
-            </a:r>
-          </a:p>
-        </p:txBody>
-      </p:sp>
-      <p:sp>
-        <p:nvSpPr>
-          <p:cNvPr id="13" name="TextBox 12"/>
-          <p:cNvSpPr txBox="1"/>
-          <p:nvPr/>
-        </p:nvSpPr>
-        <p:spPr>
-          <a:xfrm>
-            <a:off x="1005840" y="6236208"/>
-            <a:ext cx="5486400" cy="274320"/>
-          </a:xfrm>
-          <a:prstGeom prst="rect">
-            <a:avLst/>
-          </a:prstGeom>
-          <a:noFill/>
-        </p:spPr>
-        <p:txBody>
-          <a:bodyPr wrap="square" lIns="0" rIns="0" tIns="0" bIns="0" anchor="t">
-            <a:noAutofit/>
-          </a:bodyPr>
-          <a:lstStyle/>
-          <a:p>
-            <a:pPr algn="l">
-              <a:lnSpc>
-                <a:spcPct val="115000"/>
-              </a:lnSpc>
-              <a:spcBef>
-                <a:spcPts val="0"/>
-              </a:spcBef>
-              <a:spcAft>
-                <a:spcPts val="0"/>
-              </a:spcAft>
-            </a:pPr>
-            <a:r>
-              <a:rPr sz="1050" b="0" i="0">
-                <a:solidFill>
-                  <a:srgbClr val="9A9EA5"/>
-                </a:solidFill>
-                <a:latin typeface="맑은 고딕"/>
-                <a:ea typeface="맑은 고딕"/>
-                <a:cs typeface="맑은 고딕"/>
-              </a:rPr>
-              <a:t>2026 금융 AI Challenge 제출본</a:t>
-            </a:r>
-          </a:p>
-        </p:txBody>
-      </p:sp>
     </p:spTree>
   </p:cSld>
   <p:clrMapOvr>
@@ -8165,7 +7932,7 @@
                 <a:ea typeface="맑은 고딕"/>
                 <a:cs typeface="맑은 고딕"/>
               </a:rPr>
-              <a:t>A1 · LLM 프로바이더 추상화와 환각 차단 설계</a:t>
+              <a:t>A1 · LLM 프로바이더 추상화와 판정 분리</a:t>
             </a:r>
           </a:p>
         </p:txBody>
@@ -8212,7 +7979,7 @@
                 <a:ea typeface="맑은 고딕"/>
                 <a:cs typeface="맑은 고딕"/>
               </a:rPr>
-              <a:t>LLM은 말을 하고, 숫자는 엔진이 만듭니다 — 그리고 그 LLM은 언제든 교체할 수 있습니다.</a:t>
+              <a:t>LLM은 엔진 결과를 설명하고 핵심 판정 수치는 엔진이 계산합니다.</a:t>
             </a:r>
           </a:p>
         </p:txBody>
@@ -9000,7 +8767,7 @@
                 <a:ea typeface="맑은 고딕"/>
                 <a:cs typeface="맑은 고딕"/>
               </a:rPr>
-              <a:t>(재계산 불가)</a:t>
+              <a:t>(판정 정본)</a:t>
             </a:r>
           </a:p>
         </p:txBody>
@@ -9148,7 +8915,7 @@
                 <a:ea typeface="맑은 고딕"/>
                 <a:cs typeface="맑은 고딕"/>
               </a:rPr>
-              <a:t>반환값만 인용해</a:t>
+              <a:t>도구 결과를 바탕으로</a:t>
             </a:r>
           </a:p>
           <a:p>
@@ -10127,7 +9894,7 @@
                 <a:ea typeface="맑은 고딕"/>
                 <a:cs typeface="맑은 고딕"/>
               </a:rPr>
-              <a:t>② 환각 차단 3중 장치 — 프로바이더가 무엇이든 숫자는 바뀌지 않습니다</a:t>
+              <a:t>② 답변 오류 위험을 줄이는 3중 장치</a:t>
             </a:r>
           </a:p>
         </p:txBody>
@@ -10198,7 +9965,7 @@
                 <a:ea typeface="맑은 고딕"/>
                 <a:cs typeface="맑은 고딕"/>
               </a:rPr>
-              <a:t>G1  숫자 생성 권한 분리</a:t>
+              <a:t>G1  핵심 수치 계산 분리</a:t>
             </a:r>
           </a:p>
           <a:p>
@@ -10222,7 +9989,7 @@
                 <a:ea typeface="맑은 고딕"/>
                 <a:cs typeface="맑은 고딕"/>
               </a:rPr>
-              <a:t>금액·비율·점수는 엔진 반환값만 사용하고,</a:t>
+              <a:t>금액·비율·점수는 엔진이 계산하고,</a:t>
             </a:r>
           </a:p>
           <a:p>
@@ -10246,7 +10013,7 @@
                 <a:ea typeface="맑은 고딕"/>
                 <a:cs typeface="맑은 고딕"/>
               </a:rPr>
-              <a:t>모델이 산출한 수치는 답변에 싣지 않습니다.</a:t>
+              <a:t>모델에는 도구 반환값 사용을 지시합니다.</a:t>
             </a:r>
           </a:p>
         </p:txBody>
@@ -10317,7 +10084,7 @@
                 <a:ea typeface="맑은 고딕"/>
                 <a:cs typeface="맑은 고딕"/>
               </a:rPr>
-              <a:t>G2  근거 문자열 강제 동반</a:t>
+              <a:t>G2  근거 문자열 동반</a:t>
             </a:r>
           </a:p>
           <a:p>
@@ -10365,7 +10132,7 @@
                 <a:ea typeface="맑은 고딕"/>
                 <a:cs typeface="맑은 고딕"/>
               </a:rPr>
-              <a:t>답변은 그 문자열을 근거로 구성됩니다.</a:t>
+              <a:t>프롬프트가 그 근거 사용을 지시합니다.</a:t>
             </a:r>
           </a:p>
         </p:txBody>
@@ -10436,7 +10203,7 @@
                 <a:ea typeface="맑은 고딕"/>
                 <a:cs typeface="맑은 고딕"/>
               </a:rPr>
-              <a:t>G3  프로바이더 무관 재현성</a:t>
+              <a:t>G3  판정 경로 재현성</a:t>
             </a:r>
           </a:p>
           <a:p>
@@ -10460,7 +10227,7 @@
                 <a:ea typeface="맑은 고딕"/>
                 <a:cs typeface="맑은 고딕"/>
               </a:rPr>
-              <a:t>1·2·3순위 어느 경로로 답해도</a:t>
+              <a:t>어느 제공자를 쓰더라도 핵심 판정은</a:t>
             </a:r>
           </a:p>
           <a:p>
@@ -10484,7 +10251,7 @@
                 <a:ea typeface="맑은 고딕"/>
                 <a:cs typeface="맑은 고딕"/>
               </a:rPr>
-              <a:t>판정 수치는 완전히 동일합니다.</a:t>
+              <a:t>같은 결정론적 엔진이 계산합니다.</a:t>
             </a:r>
           </a:p>
         </p:txBody>
@@ -14596,7 +14363,7 @@
                 <a:ea typeface="맑은 고딕"/>
                 <a:cs typeface="맑은 고딕"/>
               </a:rPr>
-              <a:t>화면은 이 계보를 등급과 함께 보이고, 등급이 낮은 이유를 원인 유형별로 나눠 적습니다 — 「검증 안 됨 N건, 대응 주체는 수집 배치」처럼.</a:t>
+              <a:t>API 응답은 계보와 상세 등급을 보존하고, 사용자 화면은 정책 출처와 확인할 사항을 안내합니다.</a:t>
             </a:r>
           </a:p>
         </p:txBody>
@@ -14999,7 +14766,7 @@
                 <a:ea typeface="맑은 고딕"/>
                 <a:cs typeface="맑은 고딕"/>
               </a:rPr>
-              <a:t>값을 지어내지 않습니다. 빈 칸은 실패가 아닙니다.</a:t>
+              <a:t>확인되지 않은 값을 0으로 바꾸지 않습니다.</a:t>
             </a:r>
           </a:p>
           <a:p>
@@ -15070,7 +14837,7 @@
                 <a:ea typeface="맑은 고딕"/>
                 <a:cs typeface="맑은 고딕"/>
               </a:rPr>
-              <a:t>이 원칙이 화면·API 응답·기술설명서에 같은 문장으로 나타나는지를 자동 검사가 대조합니다.</a:t>
+              <a:t>자동 검사는 이 원칙이 API 응답과 기술설명서에 같은 기준으로 기록되는지 대조합니다.</a:t>
             </a:r>
           </a:p>
         </p:txBody>
@@ -18071,7 +17838,7 @@
                 <a:ea typeface="맑은 고딕"/>
                 <a:cs typeface="맑은 고딕"/>
               </a:rPr>
-              <a:t>③ AI 상담 채팅</a:t>
+              <a:t>③ 진단 결과 질문</a:t>
             </a:r>
           </a:p>
         </p:txBody>
@@ -18451,7 +18218,7 @@
                 <a:ea typeface="맑은 고딕"/>
                 <a:cs typeface="맑은 고딕"/>
               </a:rPr>
-              <a:t>호출된 도구 표시</a:t>
+              <a:t>실패 시 저장된 안내</a:t>
             </a:r>
           </a:p>
         </p:txBody>
@@ -28111,7 +27878,7 @@
                 <a:ea typeface="맑은 고딕"/>
                 <a:cs typeface="맑은 고딕"/>
               </a:rPr>
-              <a:t>핵심 차별점 — 우리는 추천하지 않고 판정합니다</a:t>
+              <a:t>핵심 차별점 — 추천하지 않고 판정합니다</a:t>
             </a:r>
           </a:p>
         </p:txBody>
@@ -28158,7 +27925,7 @@
                 <a:ea typeface="맑은 고딕"/>
                 <a:cs typeface="맑은 고딕"/>
               </a:rPr>
-              <a:t>“청년 전세대출 추천 챗봇”과 구조적으로 다른 네 가지 설계 결정</a:t>
+              <a:t>“단순 청년 전세대출 추천 챗봇”과 구조적으로 다른 네 가지 설계 결정</a:t>
             </a:r>
           </a:p>
         </p:txBody>
@@ -29323,7 +29090,7 @@
                 <a:ea typeface="맑은 고딕"/>
                 <a:cs typeface="맑은 고딕"/>
               </a:rPr>
-              <a:t>환각 차단 + 벤더 비종속</a:t>
+              <a:t>판정 분리 + 벤더 비종속</a:t>
             </a:r>
           </a:p>
           <a:p>
@@ -29347,7 +29114,7 @@
                 <a:ea typeface="맑은 고딕"/>
                 <a:cs typeface="맑은 고딕"/>
               </a:rPr>
-              <a:t>LLM은 자연어 인터페이스일 뿐,</a:t>
+              <a:t>LLM은 자연어 인터페이스이고,</a:t>
             </a:r>
           </a:p>
           <a:p>
@@ -29371,7 +29138,7 @@
                 <a:ea typeface="맑은 고딕"/>
                 <a:cs typeface="맑은 고딕"/>
               </a:rPr>
-              <a:t>숫자는 결정론적 엔진이</a:t>
+              <a:t>핵심 판정 수치는</a:t>
             </a:r>
           </a:p>
           <a:p>
@@ -29395,7 +29162,7 @@
                 <a:ea typeface="맑은 고딕"/>
                 <a:cs typeface="맑은 고딕"/>
               </a:rPr>
-              <a:t>100% 계산합니다.</a:t>
+              <a:t>결정론적 엔진이 계산합니다.</a:t>
             </a:r>
           </a:p>
           <a:p>
